--- a/docs/proposals/softbank-ultraman-caravan/SB様提示用_お見積り_週20ライン2年間.pptx
+++ b/docs/proposals/softbank-ultraman-caravan/SB様提示用_お見積り_週20ライン2年間.pptx
@@ -4172,7 +4172,7 @@
                 <a:latin typeface="Meiryo"/>
                 <a:ea typeface="Meiryo"/>
               </a:rPr>
-              <a:t>お見積り:2年間合計 25億4,000万円(税別)+従量精算分</a:t>
+              <a:t>お見積り:2年間合計 19億6,400万円(税別)+従量精算分</a:t>
             </a:r>
           </a:p>
         </p:txBody>
@@ -4212,7 +4212,7 @@
                 <a:latin typeface="Meiryo"/>
                 <a:ea typeface="Meiryo"/>
               </a:rPr>
-              <a:t>固定・従量の構成はテストと同一です。ノベルティは貴社制作に切り替え、当社は下代の20%を許諾料として申し受けます</a:t>
+              <a:t>固定費はIP利用料とライブ費の2項目のみ。キット・ノベルティは貴社制作とし、当社は作成許諾料を申し受けるシンプルな構成です</a:t>
             </a:r>
           </a:p>
         </p:txBody>
@@ -4763,7 +4763,7 @@
                           <a:latin typeface="Meiryo"/>
                           <a:ea typeface="Meiryo"/>
                         </a:rPr>
-                        <a:t>③ イベントキット利用料</a:t>
+                        <a:t>小計(固定)</a:t>
                       </a:r>
                     </a:p>
                   </a:txBody>
@@ -4786,7 +4786,7 @@
                           <a:latin typeface="Meiryo"/>
                           <a:ea typeface="Meiryo"/>
                         </a:rPr>
-                        <a:t>30万円/開催 × 960開催</a:t>
+                        <a:t/>
                       </a:r>
                     </a:p>
                   </a:txBody>
@@ -4802,14 +4802,14 @@
                     <a:lstStyle/>
                     <a:p>
                       <a:r>
-                        <a:rPr sz="1150" b="0">
+                        <a:rPr sz="1150" b="1">
                           <a:solidFill>
                             <a:srgbClr val="1A1A1A"/>
                           </a:solidFill>
                           <a:latin typeface="Meiryo"/>
                           <a:ea typeface="Meiryo"/>
                         </a:rPr>
-                        <a:t>2億8,800万円</a:t>
+                        <a:t>9億8,000万円</a:t>
                       </a:r>
                     </a:p>
                   </a:txBody>
@@ -4825,14 +4825,14 @@
                     <a:lstStyle/>
                     <a:p>
                       <a:r>
-                        <a:rPr sz="1150" b="0">
+                        <a:rPr sz="1150" b="1">
                           <a:solidFill>
                             <a:srgbClr val="1A1A1A"/>
                           </a:solidFill>
                           <a:latin typeface="Meiryo"/>
                           <a:ea typeface="Meiryo"/>
                         </a:rPr>
-                        <a:t>2億8,800万円</a:t>
+                        <a:t>9億8,400万円</a:t>
                       </a:r>
                     </a:p>
                   </a:txBody>
@@ -4848,14 +4848,14 @@
                     <a:lstStyle/>
                     <a:p>
                       <a:r>
-                        <a:rPr sz="1150" b="0">
+                        <a:rPr sz="1150" b="1">
                           <a:solidFill>
-                            <a:srgbClr val="1A1A1A"/>
+                            <a:srgbClr val="C00000"/>
                           </a:solidFill>
                           <a:latin typeface="Meiryo"/>
                           <a:ea typeface="Meiryo"/>
                         </a:rPr>
-                        <a:t>5億7,600万円</a:t>
+                        <a:t>19億6,400万円</a:t>
                       </a:r>
                     </a:p>
                   </a:txBody>
@@ -4880,130 +4880,13 @@
                           <a:latin typeface="Meiryo"/>
                           <a:ea typeface="Meiryo"/>
                         </a:rPr>
-                        <a:t>小計(固定)</a:t>
+                        <a:t>③ ノベルティ作成許諾料</a:t>
                       </a:r>
                     </a:p>
                   </a:txBody>
                   <a:tcPr anchor="ctr" marL="73152" marR="73152">
                     <a:solidFill>
                       <a:srgbClr val="F2F4F6"/>
-                    </a:solidFill>
-                  </a:tcPr>
-                </a:tc>
-                <a:tc>
-                  <a:txBody>
-                    <a:bodyPr/>
-                    <a:lstStyle/>
-                    <a:p>
-                      <a:r>
-                        <a:rPr sz="1150" b="0">
-                          <a:solidFill>
-                            <a:srgbClr val="1A1A1A"/>
-                          </a:solidFill>
-                          <a:latin typeface="Meiryo"/>
-                          <a:ea typeface="Meiryo"/>
-                        </a:rPr>
-                        <a:t/>
-                      </a:r>
-                    </a:p>
-                  </a:txBody>
-                  <a:tcPr anchor="ctr" marL="73152" marR="73152">
-                    <a:solidFill>
-                      <a:srgbClr val="F2F4F6"/>
-                    </a:solidFill>
-                  </a:tcPr>
-                </a:tc>
-                <a:tc>
-                  <a:txBody>
-                    <a:bodyPr/>
-                    <a:lstStyle/>
-                    <a:p>
-                      <a:r>
-                        <a:rPr sz="1150" b="1">
-                          <a:solidFill>
-                            <a:srgbClr val="1A1A1A"/>
-                          </a:solidFill>
-                          <a:latin typeface="Meiryo"/>
-                          <a:ea typeface="Meiryo"/>
-                        </a:rPr>
-                        <a:t>12億6,800万円</a:t>
-                      </a:r>
-                    </a:p>
-                  </a:txBody>
-                  <a:tcPr anchor="ctr" marL="73152" marR="73152">
-                    <a:solidFill>
-                      <a:srgbClr val="F2F4F6"/>
-                    </a:solidFill>
-                  </a:tcPr>
-                </a:tc>
-                <a:tc>
-                  <a:txBody>
-                    <a:bodyPr/>
-                    <a:lstStyle/>
-                    <a:p>
-                      <a:r>
-                        <a:rPr sz="1150" b="1">
-                          <a:solidFill>
-                            <a:srgbClr val="1A1A1A"/>
-                          </a:solidFill>
-                          <a:latin typeface="Meiryo"/>
-                          <a:ea typeface="Meiryo"/>
-                        </a:rPr>
-                        <a:t>12億7,200万円</a:t>
-                      </a:r>
-                    </a:p>
-                  </a:txBody>
-                  <a:tcPr anchor="ctr" marL="73152" marR="73152">
-                    <a:solidFill>
-                      <a:srgbClr val="F2F4F6"/>
-                    </a:solidFill>
-                  </a:tcPr>
-                </a:tc>
-                <a:tc>
-                  <a:txBody>
-                    <a:bodyPr/>
-                    <a:lstStyle/>
-                    <a:p>
-                      <a:r>
-                        <a:rPr sz="1150" b="1">
-                          <a:solidFill>
-                            <a:srgbClr val="C00000"/>
-                          </a:solidFill>
-                          <a:latin typeface="Meiryo"/>
-                          <a:ea typeface="Meiryo"/>
-                        </a:rPr>
-                        <a:t>25億4,000万円</a:t>
-                      </a:r>
-                    </a:p>
-                  </a:txBody>
-                  <a:tcPr anchor="ctr" marL="73152" marR="73152">
-                    <a:solidFill>
-                      <a:srgbClr val="F2F4F6"/>
-                    </a:solidFill>
-                  </a:tcPr>
-                </a:tc>
-              </a:tr>
-              <a:tr h="603504">
-                <a:tc>
-                  <a:txBody>
-                    <a:bodyPr/>
-                    <a:lstStyle/>
-                    <a:p>
-                      <a:r>
-                        <a:rPr sz="1150" b="1">
-                          <a:solidFill>
-                            <a:srgbClr val="1A1A1A"/>
-                          </a:solidFill>
-                          <a:latin typeface="Meiryo"/>
-                          <a:ea typeface="Meiryo"/>
-                        </a:rPr>
-                        <a:t>④ ノベルティ作成許諾料</a:t>
-                      </a:r>
-                    </a:p>
-                  </a:txBody>
-                  <a:tcPr anchor="ctr" marL="73152" marR="73152">
-                    <a:solidFill>
-                      <a:srgbClr val="FFFFFF"/>
                     </a:solidFill>
                   </a:tcPr>
                 </a:tc>
@@ -5033,6 +4916,135 @@
                           <a:ea typeface="Meiryo"/>
                         </a:rPr>
                         <a:t>下代(卸価格)の20%</a:t>
+                      </a:r>
+                    </a:p>
+                  </a:txBody>
+                  <a:tcPr anchor="ctr" marL="73152" marR="73152">
+                    <a:solidFill>
+                      <a:srgbClr val="F2F4F6"/>
+                    </a:solidFill>
+                  </a:tcPr>
+                </a:tc>
+                <a:tc>
+                  <a:txBody>
+                    <a:bodyPr/>
+                    <a:lstStyle/>
+                    <a:p>
+                      <a:r>
+                        <a:rPr sz="1150" b="0">
+                          <a:solidFill>
+                            <a:srgbClr val="1A1A1A"/>
+                          </a:solidFill>
+                          <a:latin typeface="Meiryo"/>
+                          <a:ea typeface="Meiryo"/>
+                        </a:rPr>
+                        <a:t>従量精算</a:t>
+                      </a:r>
+                    </a:p>
+                  </a:txBody>
+                  <a:tcPr anchor="ctr" marL="73152" marR="73152">
+                    <a:solidFill>
+                      <a:srgbClr val="F2F4F6"/>
+                    </a:solidFill>
+                  </a:tcPr>
+                </a:tc>
+                <a:tc>
+                  <a:txBody>
+                    <a:bodyPr/>
+                    <a:lstStyle/>
+                    <a:p>
+                      <a:r>
+                        <a:rPr sz="1150" b="0">
+                          <a:solidFill>
+                            <a:srgbClr val="1A1A1A"/>
+                          </a:solidFill>
+                          <a:latin typeface="Meiryo"/>
+                          <a:ea typeface="Meiryo"/>
+                        </a:rPr>
+                        <a:t>従量精算</a:t>
+                      </a:r>
+                    </a:p>
+                  </a:txBody>
+                  <a:tcPr anchor="ctr" marL="73152" marR="73152">
+                    <a:solidFill>
+                      <a:srgbClr val="F2F4F6"/>
+                    </a:solidFill>
+                  </a:tcPr>
+                </a:tc>
+                <a:tc>
+                  <a:txBody>
+                    <a:bodyPr/>
+                    <a:lstStyle/>
+                    <a:p>
+                      <a:r>
+                        <a:rPr sz="1150" b="0">
+                          <a:solidFill>
+                            <a:srgbClr val="1A1A1A"/>
+                          </a:solidFill>
+                          <a:latin typeface="Meiryo"/>
+                          <a:ea typeface="Meiryo"/>
+                        </a:rPr>
+                        <a:t>従量精算</a:t>
+                      </a:r>
+                    </a:p>
+                  </a:txBody>
+                  <a:tcPr anchor="ctr" marL="73152" marR="73152">
+                    <a:solidFill>
+                      <a:srgbClr val="F2F4F6"/>
+                    </a:solidFill>
+                  </a:tcPr>
+                </a:tc>
+              </a:tr>
+              <a:tr h="603504">
+                <a:tc>
+                  <a:txBody>
+                    <a:bodyPr/>
+                    <a:lstStyle/>
+                    <a:p>
+                      <a:r>
+                        <a:rPr sz="1150" b="1">
+                          <a:solidFill>
+                            <a:srgbClr val="1A1A1A"/>
+                          </a:solidFill>
+                          <a:latin typeface="Meiryo"/>
+                          <a:ea typeface="Meiryo"/>
+                        </a:rPr>
+                        <a:t>④ イベントキット作成許諾料</a:t>
+                      </a:r>
+                    </a:p>
+                  </a:txBody>
+                  <a:tcPr anchor="ctr" marL="73152" marR="73152">
+                    <a:solidFill>
+                      <a:srgbClr val="FFFFFF"/>
+                    </a:solidFill>
+                  </a:tcPr>
+                </a:tc>
+                <a:tc>
+                  <a:txBody>
+                    <a:bodyPr/>
+                    <a:lstStyle/>
+                    <a:p>
+                      <a:r>
+                        <a:rPr sz="1150" b="0">
+                          <a:solidFill>
+                            <a:srgbClr val="1A1A1A"/>
+                          </a:solidFill>
+                          <a:latin typeface="Meiryo"/>
+                          <a:ea typeface="Meiryo"/>
+                        </a:rPr>
+                        <a:t>貴社制作キットの</a:t>
+                      </a:r>
+                    </a:p>
+                    <a:p>
+                      <a:r>
+                        <a:rPr sz="1150" b="0">
+                          <a:solidFill>
+                            <a:srgbClr val="1A1A1A"/>
+                          </a:solidFill>
+                          <a:latin typeface="Meiryo"/>
+                          <a:ea typeface="Meiryo"/>
+                        </a:rPr>
+                        <a:t>作成費用の20%(当社監修)</a:t>
                       </a:r>
                     </a:p>
                   </a:txBody>
@@ -5151,7 +5163,7 @@
                 <a:latin typeface="Meiryo"/>
                 <a:ea typeface="Meiryo"/>
               </a:rPr>
-              <a:t>月額換算:約1億580万円/月(固定分)。実施されなかった開催分は請求いたしません(最低開催数のお約束は次頁)。</a:t>
+              <a:t>月額換算:約8,170万円/月(固定分)。実施されなかった開催分は請求いたしません(最低開催数のお約束は次頁)。</a:t>
             </a:r>
           </a:p>
         </p:txBody>
@@ -5208,7 +5220,7 @@
                 <a:latin typeface="Meiryo"/>
                 <a:ea typeface="Meiryo"/>
               </a:rPr>
-              <a:t>※ 店頭訴求ツール(ポスター・チラシ等)の作成許諾料(作成費用の20%)は本見積りの対象外で、従来ご提示のとおり別途精算です。</a:t>
+              <a:t>※ 店頭訴求ツール(ポスター・チラシ等)の作成許諾料(作成費用の20%)は従来ご提示のとおり別途精算です(③④と同じ扱い)。</a:t>
             </a:r>
           </a:p>
           <a:p>
@@ -5225,7 +5237,7 @@
                 <a:latin typeface="Meiryo"/>
                 <a:ea typeface="Meiryo"/>
               </a:rPr>
-              <a:t>※ 連休等で3日間開催とする場合:ライブ費+50万円/日・キット+10万円/日を追加で申し受けます。</a:t>
+              <a:t>※ 連休等で3日間開催とする場合:ライブ費+50万円/日を追加で申し受けます。</a:t>
             </a:r>
           </a:p>
         </p:txBody>
@@ -5861,7 +5873,7 @@
                 <a:latin typeface="Meiryo"/>
                 <a:ea typeface="Meiryo"/>
               </a:rPr>
-              <a:t>③ イベントキット利用料 30万円/開催</a:t>
+              <a:t>③ ノベルティ作成許諾料(下代の20%)</a:t>
             </a:r>
           </a:p>
           <a:p>
@@ -5878,7 +5890,7 @@
                 <a:latin typeface="Meiryo"/>
                 <a:ea typeface="Meiryo"/>
               </a:rPr>
-              <a:t>・バックパネル・装飾ツール等の会場設営一式</a:t>
+              <a:t>・貴社にてノベルティを制作いただく方式に切り替え</a:t>
             </a:r>
           </a:p>
           <a:p>
@@ -5895,7 +5907,7 @@
                 <a:latin typeface="Meiryo"/>
                 <a:ea typeface="Meiryo"/>
               </a:rPr>
-              <a:t>・テストと同一の提供内容</a:t>
+              <a:t>・当社は商品企画の監修と作成許諾を提供し、</a:t>
             </a:r>
           </a:p>
           <a:p>
@@ -5912,7 +5924,24 @@
                 <a:latin typeface="Meiryo"/>
                 <a:ea typeface="Meiryo"/>
               </a:rPr>
-              <a:t>・長期契約に伴うキット保有形態の最適化(ご相談可能)</a:t>
+              <a:t>  下代(卸価格)の20%を許諾料として申し受けます</a:t>
+            </a:r>
+          </a:p>
+          <a:p>
+            <a:pPr algn="l">
+              <a:spcAft>
+                <a:spcPts val="400"/>
+              </a:spcAft>
+            </a:pPr>
+            <a:r>
+              <a:rPr sz="1100" b="0">
+                <a:solidFill>
+                  <a:srgbClr val="1A1A1A"/>
+                </a:solidFill>
+                <a:latin typeface="Meiryo"/>
+                <a:ea typeface="Meiryo"/>
+              </a:rPr>
+              <a:t>・大量供給の安定化とコスト最適化が見込めます</a:t>
             </a:r>
           </a:p>
         </p:txBody>
@@ -5998,7 +6027,7 @@
                 <a:latin typeface="Meiryo"/>
                 <a:ea typeface="Meiryo"/>
               </a:rPr>
-              <a:t>④ ノベルティ作成許諾料(下代の20%)</a:t>
+              <a:t>④ イベントキット作成許諾料(作成費用の20%)</a:t>
             </a:r>
           </a:p>
           <a:p>
@@ -6015,7 +6044,7 @@
                 <a:latin typeface="Meiryo"/>
                 <a:ea typeface="Meiryo"/>
               </a:rPr>
-              <a:t>・貴社にてノベルティを制作いただく方式に切り替え</a:t>
+              <a:t>・バックパネル・装飾ツール等は貴社にて制作・保有</a:t>
             </a:r>
           </a:p>
           <a:p>
@@ -6032,7 +6061,7 @@
                 <a:latin typeface="Meiryo"/>
                 <a:ea typeface="Meiryo"/>
               </a:rPr>
-              <a:t>・当社は商品企画の監修と作成許諾を提供し、</a:t>
+              <a:t>・当社はデザイン監修と作成許諾を提供し、</a:t>
             </a:r>
           </a:p>
           <a:p>
@@ -6049,7 +6078,7 @@
                 <a:latin typeface="Meiryo"/>
                 <a:ea typeface="Meiryo"/>
               </a:rPr>
-              <a:t>  下代(卸価格)の20%を許諾料として申し受けます</a:t>
+              <a:t>  作成費用の20%を許諾料として申し受けます</a:t>
             </a:r>
           </a:p>
           <a:p>
@@ -6066,7 +6095,7 @@
                 <a:latin typeface="Meiryo"/>
                 <a:ea typeface="Meiryo"/>
               </a:rPr>
-              <a:t>・大量供給の安定化とコスト最適化が見込めます</a:t>
+              <a:t>・20ライン分の設営ツールを貴社仕様で最適化できます</a:t>
             </a:r>
           </a:p>
         </p:txBody>
